--- a/presentation/agentic-customer-support.pptx
+++ b/presentation/agentic-customer-support.pptx
@@ -3643,7 +3643,7 @@
               </a:defRPr>
             </a:pPr>
             <a:r>
-              <a:t>Next: compliant tool-calling/ReAct path and grounded product answer generation</a:t>
+              <a:t>Separate live Groq product-answer and native-tool smoke checks passed</a:t>
             </a:r>
           </a:p>
           <a:p>
@@ -3659,7 +3659,7 @@
               </a:defRPr>
             </a:pPr>
             <a:r>
-              <a:t>Then: live interruption follow-up validation and acoustic latency measurement</a:t>
+              <a:t>Next: speech follow-up and acoustic latency measurement</a:t>
             </a:r>
           </a:p>
         </p:txBody>
@@ -4247,7 +4247,7 @@
                 </a:solidFill>
                 <a:latin typeface="Aptos"/>
               </a:rPr>
-              <a:t>Grounding and implementation gaps</a:t>
+              <a:t>Grounded answers and tool-calling choice</a:t>
             </a:r>
           </a:p>
         </p:txBody>
@@ -4318,7 +4318,7 @@
               </a:defRPr>
             </a:pPr>
             <a:r>
-              <a:t>Product handler retrieves passages but does not yet generate a grounded answer</a:t>
+              <a:t>Product answers cite retrieved chunks; only cited facts reach the output claim guard</a:t>
             </a:r>
           </a:p>
           <a:p>
@@ -4334,7 +4334,7 @@
               </a:defRPr>
             </a:pPr>
             <a:r>
-              <a:t>Tool dispatch is deterministic; native function calling/ReAct is not implemented</a:t>
+              <a:t>Native Groq calls select one allow-listed tool; local code validates arguments and ownership</a:t>
             </a:r>
           </a:p>
         </p:txBody>
@@ -4511,7 +4511,7 @@
               </a:defRPr>
             </a:pPr>
             <a:r>
-              <a:t>Keyless regression suite: 62 passed; 2 dependency deprecation warnings</a:t>
+              <a:t>Keyless suite: 81 passed, 2 live checks skipped; 2 dependency warnings</a:t>
             </a:r>
           </a:p>
           <a:p>

--- a/presentation/agentic-customer-support.pptx
+++ b/presentation/agentic-customer-support.pptx
@@ -3244,7 +3244,7 @@
               </a:defRPr>
             </a:pPr>
             <a:r>
-              <a:t>Status: Step 8 live follow-up acceptance remains incomplete</a:t>
+              <a:t>Status: recorded-audio follow-ups pass; live latency remains high</a:t>
             </a:r>
           </a:p>
         </p:txBody>
@@ -3659,7 +3659,7 @@
               </a:defRPr>
             </a:pPr>
             <a:r>
-              <a:t>Next: speech follow-up and acoustic latency measurement</a:t>
+              <a:t>Next: reduce voice latency, measure acoustic output, practice unaided</a:t>
             </a:r>
           </a:p>
         </p:txBody>
@@ -4511,7 +4511,7 @@
               </a:defRPr>
             </a:pPr>
             <a:r>
-              <a:t>Keyless suite: 81 passed, 2 live checks skipped; 2 dependency warnings</a:t>
+              <a:t>Keyless suite: 89 passed, 2 live checks skipped; 2 dependency warnings</a:t>
             </a:r>
           </a:p>
           <a:p>
@@ -4977,7 +4977,7 @@
               </a:defRPr>
             </a:pPr>
             <a:r>
-              <a:t>Wrong-order speech interrupted; live input safety failed closed</a:t>
+              <a:t>Normal order, return eligibility, and wrong-order follow-ups completed safely</a:t>
             </a:r>
           </a:p>
           <a:p>
@@ -4993,7 +4993,7 @@
               </a:defRPr>
             </a:pPr>
             <a:r>
-              <a:t>Adversarial speech interrupted; live classifier failed closed; no refund promised</a:t>
+              <a:t>Adversarial follow-up escalated; no refund promise or stale response</a:t>
             </a:r>
           </a:p>
           <a:p>
@@ -5186,7 +5186,7 @@
               </a:defRPr>
             </a:pPr>
             <a:r>
-              <a:t>Wrong-order: 3665.86 ms to application playback start</a:t>
+              <a:t>Successful speech follow-ups: 19,293.912-20,168.889 ms to app playback start</a:t>
             </a:r>
           </a:p>
           <a:p>
@@ -5202,7 +5202,7 @@
               </a:defRPr>
             </a:pPr>
             <a:r>
-              <a:t>Adversarial: 5672.024 ms; injected failure handoff: 2585.583 ms</a:t>
+              <a:t>Injected failure handoff: 15,886.752 ms; cancellation call: 105-128 ms</a:t>
             </a:r>
           </a:p>
           <a:p>
@@ -5218,7 +5218,7 @@
               </a:defRPr>
             </a:pPr>
             <a:r>
-              <a:t>Timestamps are real; endpoint is application playback handoff</a:t>
+              <a:t>App playback-start latency is not first-acoustic-sample latency</a:t>
             </a:r>
           </a:p>
           <a:p>
@@ -5234,7 +5234,7 @@
               </a:defRPr>
             </a:pPr>
             <a:r>
-              <a:t>No acoustic loopback or first-physical-sample measurement</a:t>
+              <a:t>All voice latency observations exceed proposed &lt;3 second target</a:t>
             </a:r>
           </a:p>
         </p:txBody>

--- a/presentation/agentic-customer-support.pptx
+++ b/presentation/agentic-customer-support.pptx
@@ -3611,7 +3611,7 @@
               </a:defRPr>
             </a:pPr>
             <a:r>
-              <a:t>Voice-to-text/human shared-state transfer is designed, not implemented</a:t>
+              <a:t>Voice and text share session memory; handoffs carry a turn summary (process-local)</a:t>
             </a:r>
           </a:p>
           <a:p>
@@ -3836,7 +3836,7 @@
               </a:defRPr>
             </a:pPr>
             <a:r>
-              <a:t>Input shape checks -&gt; InputGuard -&gt; structured intent router</a:t>
+              <a:t>Input shape checks -&gt; InputGuard -&gt; hybrid router (rules, examples, LLM)</a:t>
             </a:r>
           </a:p>
           <a:p>
@@ -3852,7 +3852,7 @@
               </a:defRPr>
             </a:pPr>
             <a:r>
-              <a:t>Registered handler -&gt; read-only tools or semantic retrieval</a:t>
+              <a:t>Handler: read-only tools, hybrid retrieval, human handoff, or conversation agent</a:t>
             </a:r>
           </a:p>
           <a:p>
@@ -4286,7 +4286,7 @@
               </a:defRPr>
             </a:pPr>
             <a:r>
-              <a:t>12 original KB documents; local MiniLM embeddings and exact cosine scan</a:t>
+              <a:t>12 original KB documents; multilingual-e5-small + BM25 fusion, top-candidate gate</a:t>
             </a:r>
           </a:p>
           <a:p>
@@ -4302,7 +4302,7 @@
               </a:defRPr>
             </a:pPr>
             <a:r>
-              <a:t>Retrieval keeps source and chunk provenance; insufficient evidence is explicit</a:t>
+              <a:t>Retrieval gate tuned for recall; the answerer declines when evidence is insufficient</a:t>
             </a:r>
           </a:p>
           <a:p>
@@ -4472,7 +4472,7 @@
                 </a:solidFill>
                 <a:latin typeface="Aptos"/>
               </a:rPr>
-              <a:t>Measured offline baseline</a:t>
+              <a:t>Measured improvement on held-out sets</a:t>
             </a:r>
           </a:p>
         </p:txBody>
@@ -4511,7 +4511,7 @@
               </a:defRPr>
             </a:pPr>
             <a:r>
-              <a:t>Keyless suite: 89 passed, 2 live checks skipped; 2 dependency warnings</a:t>
+              <a:t>Live routing (110 cases): strict accuracy 0.509 -&gt; 0.955; dead ends 0.355 -&gt; 0.009</a:t>
             </a:r>
           </a:p>
           <a:p>
@@ -4527,7 +4527,7 @@
               </a:defRPr>
             </a:pPr>
             <a:r>
-              <a:t>Routing accuracy 0.8333; retrieval recall@5 0.7273</a:t>
+              <a:t>False escalations 0.117 -&gt; 0; LLM calls per message 1.28 -&gt; 0.245; p95 16.4 s -&gt; 0.70 s</a:t>
             </a:r>
           </a:p>
           <a:p>
@@ -4543,7 +4543,7 @@
               </a:defRPr>
             </a:pPr>
             <a:r>
-              <a:t>Input guardrail recall 0.6667; output guardrail recall 1.0</a:t>
+              <a:t>Retrieval (45 cases): evidence recall 0.516 -&gt; 0.922; live: 0.938 answered, 13/13 near-misses declined</a:t>
             </a:r>
           </a:p>
           <a:p>
@@ -4559,7 +4559,7 @@
               </a:defRPr>
             </a:pPr>
             <a:r>
-              <a:t>Classifier cache hit rate 0.5 on the measured workload</a:t>
+              <a:t>Keyless suite: 214 passed, 2 live skipped, 1 known-limitation xfail</a:t>
             </a:r>
           </a:p>
         </p:txBody>
@@ -5372,7 +5372,7 @@
                 </a:solidFill>
                 <a:latin typeface="Aptos"/>
               </a:rPr>
-              <a:t>Red-team: two reproduced gaps</a:t>
+              <a:t>Red-team: reproduced gaps (two rounds)</a:t>
             </a:r>
           </a:p>
         </p:txBody>
@@ -5411,7 +5411,7 @@
               </a:defRPr>
             </a:pPr>
             <a:r>
-              <a:t>safe=true with confidence 0.0 allowed an injection before the fix</a:t>
+              <a:t>Round 1 (fixed): low-confidence safe=true and unverified natural-language dates</a:t>
             </a:r>
           </a:p>
           <a:p>
@@ -5427,7 +5427,7 @@
               </a:defRPr>
             </a:pPr>
             <a:r>
-              <a:t>Natural-language unverified delivery date passed output validation before the fix</a:t>
+              <a:t>Round 2 (fixed): greeting dead ends, off-topic escalations, comparison crash</a:t>
             </a:r>
           </a:p>
           <a:p>
@@ -5443,7 +5443,7 @@
               </a:defRPr>
             </a:pPr>
             <a:r>
-              <a:t>Both fixes have service-boundary regression tests</a:t>
+              <a:t>Round 2 (open): 'my refund' policy question -&gt; order tool; human + order ID -&gt; no handoff</a:t>
             </a:r>
           </a:p>
           <a:p>
@@ -5459,7 +5459,7 @@
               </a:defRPr>
             </a:pPr>
             <a:r>
-              <a:t>Residual risks: semantic classifier errors and heuristic coverage</a:t>
+              <a:t>Round 2 (open): guard blocks negated 'refund is approved'; Hinglish answered in Devanagari</a:t>
             </a:r>
           </a:p>
         </p:txBody>
